--- a/report/VietFactCheck.pptx
+++ b/report/VietFactCheck.pptx
@@ -15377,8 +15377,8 @@
           </a:p>
         </p:txBody>
       </p:sp>
-      <mc:AlternateContent xmlns:mc="http://schemas.openxmlformats.org/markup-compatibility/2006" xmlns:a14="http://schemas.microsoft.com/office/drawing/2010/main">
-        <mc:Choice Requires="a14">
+      <mc:AlternateContent xmlns:mc="http://schemas.openxmlformats.org/markup-compatibility/2006">
+        <mc:Choice xmlns:a14="http://schemas.microsoft.com/office/drawing/2010/main" Requires="a14">
           <p:sp>
             <p:nvSpPr>
               <p:cNvPr id="3" name="TextBox 2">
@@ -15415,15 +15415,39 @@
                   <a:buChar char="•"/>
                 </a:pPr>
                 <a:r>
-                  <a:rPr lang="en-US" b="1" err="1">
+                  <a:rPr lang="en-US" b="1" dirty="0">
                     <a:latin typeface="+mj-lt"/>
                     <a:ea typeface="Ebrima" panose="02000000000000000000" pitchFamily="2" charset="0"/>
                     <a:cs typeface="Ebrima" panose="02000000000000000000" pitchFamily="2" charset="0"/>
                   </a:rPr>
-                  <a:t>Mục</a:t>
+                  <a:t>Mục </a:t>
                 </a:r>
                 <a:r>
-                  <a:rPr lang="en-US" b="1">
+                  <a:rPr lang="en-US" b="1" dirty="0" err="1">
+                    <a:latin typeface="+mj-lt"/>
+                    <a:ea typeface="Ebrima" panose="02000000000000000000" pitchFamily="2" charset="0"/>
+                    <a:cs typeface="Ebrima" panose="02000000000000000000" pitchFamily="2" charset="0"/>
+                  </a:rPr>
+                  <a:t>đích</a:t>
+                </a:r>
+                <a:r>
+                  <a:rPr lang="en-US" b="1" dirty="0">
+                    <a:latin typeface="+mj-lt"/>
+                    <a:ea typeface="Ebrima" panose="02000000000000000000" pitchFamily="2" charset="0"/>
+                    <a:cs typeface="Ebrima" panose="02000000000000000000" pitchFamily="2" charset="0"/>
+                  </a:rPr>
+                  <a:t>: </a:t>
+                </a:r>
+                <a:r>
+                  <a:rPr lang="en-US" dirty="0" err="1">
+                    <a:latin typeface="+mj-lt"/>
+                    <a:ea typeface="Ebrima" panose="02000000000000000000" pitchFamily="2" charset="0"/>
+                    <a:cs typeface="Ebrima" panose="02000000000000000000" pitchFamily="2" charset="0"/>
+                  </a:rPr>
+                  <a:t>Truy</a:t>
+                </a:r>
+                <a:r>
+                  <a:rPr lang="en-US" dirty="0">
                     <a:latin typeface="+mj-lt"/>
                     <a:ea typeface="Ebrima" panose="02000000000000000000" pitchFamily="2" charset="0"/>
                     <a:cs typeface="Ebrima" panose="02000000000000000000" pitchFamily="2" charset="0"/>
@@ -15431,31 +15455,15 @@
                   <a:t> </a:t>
                 </a:r>
                 <a:r>
-                  <a:rPr lang="en-US" b="1" err="1">
+                  <a:rPr lang="en-US" dirty="0" err="1">
                     <a:latin typeface="+mj-lt"/>
                     <a:ea typeface="Ebrima" panose="02000000000000000000" pitchFamily="2" charset="0"/>
                     <a:cs typeface="Ebrima" panose="02000000000000000000" pitchFamily="2" charset="0"/>
                   </a:rPr>
-                  <a:t>đích</a:t>
+                  <a:t>xuất</a:t>
                 </a:r>
                 <a:r>
-                  <a:rPr lang="en-US" b="1">
-                    <a:latin typeface="+mj-lt"/>
-                    <a:ea typeface="Ebrima" panose="02000000000000000000" pitchFamily="2" charset="0"/>
-                    <a:cs typeface="Ebrima" panose="02000000000000000000" pitchFamily="2" charset="0"/>
-                  </a:rPr>
-                  <a:t>: </a:t>
-                </a:r>
-                <a:r>
-                  <a:rPr lang="en-US" err="1">
-                    <a:latin typeface="+mj-lt"/>
-                    <a:ea typeface="Ebrima" panose="02000000000000000000" pitchFamily="2" charset="0"/>
-                    <a:cs typeface="Ebrima" panose="02000000000000000000" pitchFamily="2" charset="0"/>
-                  </a:rPr>
-                  <a:t>Truy</a:t>
-                </a:r>
-                <a:r>
-                  <a:rPr lang="en-US">
+                  <a:rPr lang="en-US" dirty="0">
                     <a:latin typeface="+mj-lt"/>
                     <a:ea typeface="Ebrima" panose="02000000000000000000" pitchFamily="2" charset="0"/>
                     <a:cs typeface="Ebrima" panose="02000000000000000000" pitchFamily="2" charset="0"/>
@@ -15463,15 +15471,15 @@
                   <a:t> </a:t>
                 </a:r>
                 <a:r>
-                  <a:rPr lang="en-US" err="1">
+                  <a:rPr lang="en-US" dirty="0" err="1">
                     <a:latin typeface="+mj-lt"/>
                     <a:ea typeface="Ebrima" panose="02000000000000000000" pitchFamily="2" charset="0"/>
                     <a:cs typeface="Ebrima" panose="02000000000000000000" pitchFamily="2" charset="0"/>
                   </a:rPr>
-                  <a:t>xuất</a:t>
+                  <a:t>các</a:t>
                 </a:r>
                 <a:r>
-                  <a:rPr lang="en-US">
+                  <a:rPr lang="en-US" dirty="0">
                     <a:latin typeface="+mj-lt"/>
                     <a:ea typeface="Ebrima" panose="02000000000000000000" pitchFamily="2" charset="0"/>
                     <a:cs typeface="Ebrima" panose="02000000000000000000" pitchFamily="2" charset="0"/>
@@ -15479,15 +15487,31 @@
                   <a:t> </a:t>
                 </a:r>
                 <a:r>
-                  <a:rPr lang="en-US" err="1">
+                  <a:rPr lang="en-US" dirty="0" err="1">
                     <a:latin typeface="+mj-lt"/>
                     <a:ea typeface="Ebrima" panose="02000000000000000000" pitchFamily="2" charset="0"/>
                     <a:cs typeface="Ebrima" panose="02000000000000000000" pitchFamily="2" charset="0"/>
                   </a:rPr>
-                  <a:t>các</a:t>
+                  <a:t>câu</a:t>
                 </a:r>
                 <a:r>
-                  <a:rPr lang="en-US">
+                  <a:rPr lang="en-US" dirty="0">
+                    <a:latin typeface="+mj-lt"/>
+                    <a:ea typeface="Ebrima" panose="02000000000000000000" pitchFamily="2" charset="0"/>
+                    <a:cs typeface="Ebrima" panose="02000000000000000000" pitchFamily="2" charset="0"/>
+                  </a:rPr>
+                  <a:t> tin </a:t>
+                </a:r>
+                <a:r>
+                  <a:rPr lang="en-US" dirty="0" err="1">
+                    <a:latin typeface="+mj-lt"/>
+                    <a:ea typeface="Ebrima" panose="02000000000000000000" pitchFamily="2" charset="0"/>
+                    <a:cs typeface="Ebrima" panose="02000000000000000000" pitchFamily="2" charset="0"/>
+                  </a:rPr>
+                  <a:t>tức</a:t>
+                </a:r>
+                <a:r>
+                  <a:rPr lang="en-US" dirty="0">
                     <a:latin typeface="+mj-lt"/>
                     <a:ea typeface="Ebrima" panose="02000000000000000000" pitchFamily="2" charset="0"/>
                     <a:cs typeface="Ebrima" panose="02000000000000000000" pitchFamily="2" charset="0"/>
@@ -15495,31 +15519,31 @@
                   <a:t> </a:t>
                 </a:r>
                 <a:r>
-                  <a:rPr lang="en-US" err="1">
+                  <a:rPr lang="en-US" dirty="0" err="1">
                     <a:latin typeface="+mj-lt"/>
                     <a:ea typeface="Ebrima" panose="02000000000000000000" pitchFamily="2" charset="0"/>
                     <a:cs typeface="Ebrima" panose="02000000000000000000" pitchFamily="2" charset="0"/>
                   </a:rPr>
-                  <a:t>câu</a:t>
+                  <a:t>tiếng</a:t>
                 </a:r>
                 <a:r>
-                  <a:rPr lang="en-US">
+                  <a:rPr lang="en-US" dirty="0">
                     <a:latin typeface="+mj-lt"/>
                     <a:ea typeface="Ebrima" panose="02000000000000000000" pitchFamily="2" charset="0"/>
                     <a:cs typeface="Ebrima" panose="02000000000000000000" pitchFamily="2" charset="0"/>
                   </a:rPr>
-                  <a:t> tin </a:t>
+                  <a:t> Việt </a:t>
                 </a:r>
                 <a:r>
-                  <a:rPr lang="en-US" err="1">
+                  <a:rPr lang="en-US" dirty="0" err="1">
                     <a:latin typeface="+mj-lt"/>
                     <a:ea typeface="Ebrima" panose="02000000000000000000" pitchFamily="2" charset="0"/>
                     <a:cs typeface="Ebrima" panose="02000000000000000000" pitchFamily="2" charset="0"/>
                   </a:rPr>
-                  <a:t>tức</a:t>
+                  <a:t>có</a:t>
                 </a:r>
                 <a:r>
-                  <a:rPr lang="en-US">
+                  <a:rPr lang="en-US" dirty="0">
                     <a:latin typeface="+mj-lt"/>
                     <a:ea typeface="Ebrima" panose="02000000000000000000" pitchFamily="2" charset="0"/>
                     <a:cs typeface="Ebrima" panose="02000000000000000000" pitchFamily="2" charset="0"/>
@@ -15527,31 +15551,15 @@
                   <a:t> </a:t>
                 </a:r>
                 <a:r>
-                  <a:rPr lang="en-US" err="1">
+                  <a:rPr lang="en-US" dirty="0" err="1">
                     <a:latin typeface="+mj-lt"/>
                     <a:ea typeface="Ebrima" panose="02000000000000000000" pitchFamily="2" charset="0"/>
                     <a:cs typeface="Ebrima" panose="02000000000000000000" pitchFamily="2" charset="0"/>
                   </a:rPr>
-                  <a:t>tiếng</a:t>
+                  <a:t>liên</a:t>
                 </a:r>
                 <a:r>
-                  <a:rPr lang="en-US">
-                    <a:latin typeface="+mj-lt"/>
-                    <a:ea typeface="Ebrima" panose="02000000000000000000" pitchFamily="2" charset="0"/>
-                    <a:cs typeface="Ebrima" panose="02000000000000000000" pitchFamily="2" charset="0"/>
-                  </a:rPr>
-                  <a:t> Việt </a:t>
-                </a:r>
-                <a:r>
-                  <a:rPr lang="en-US" err="1">
-                    <a:latin typeface="+mj-lt"/>
-                    <a:ea typeface="Ebrima" panose="02000000000000000000" pitchFamily="2" charset="0"/>
-                    <a:cs typeface="Ebrima" panose="02000000000000000000" pitchFamily="2" charset="0"/>
-                  </a:rPr>
-                  <a:t>có</a:t>
-                </a:r>
-                <a:r>
-                  <a:rPr lang="en-US">
+                  <a:rPr lang="en-US" dirty="0">
                     <a:latin typeface="+mj-lt"/>
                     <a:ea typeface="Ebrima" panose="02000000000000000000" pitchFamily="2" charset="0"/>
                     <a:cs typeface="Ebrima" panose="02000000000000000000" pitchFamily="2" charset="0"/>
@@ -15559,15 +15567,15 @@
                   <a:t> </a:t>
                 </a:r>
                 <a:r>
-                  <a:rPr lang="en-US" err="1">
+                  <a:rPr lang="en-US" dirty="0" err="1">
                     <a:latin typeface="+mj-lt"/>
                     <a:ea typeface="Ebrima" panose="02000000000000000000" pitchFamily="2" charset="0"/>
                     <a:cs typeface="Ebrima" panose="02000000000000000000" pitchFamily="2" charset="0"/>
                   </a:rPr>
-                  <a:t>liên</a:t>
+                  <a:t>quan</a:t>
                 </a:r>
                 <a:r>
-                  <a:rPr lang="en-US">
+                  <a:rPr lang="en-US" dirty="0">
                     <a:latin typeface="+mj-lt"/>
                     <a:ea typeface="Ebrima" panose="02000000000000000000" pitchFamily="2" charset="0"/>
                     <a:cs typeface="Ebrima" panose="02000000000000000000" pitchFamily="2" charset="0"/>
@@ -15575,15 +15583,15 @@
                   <a:t> </a:t>
                 </a:r>
                 <a:r>
-                  <a:rPr lang="en-US" err="1">
+                  <a:rPr lang="en-US" dirty="0" err="1">
                     <a:latin typeface="+mj-lt"/>
                     <a:ea typeface="Ebrima" panose="02000000000000000000" pitchFamily="2" charset="0"/>
                     <a:cs typeface="Ebrima" panose="02000000000000000000" pitchFamily="2" charset="0"/>
                   </a:rPr>
-                  <a:t>quan</a:t>
+                  <a:t>và</a:t>
                 </a:r>
                 <a:r>
-                  <a:rPr lang="en-US">
+                  <a:rPr lang="en-US" dirty="0">
                     <a:latin typeface="+mj-lt"/>
                     <a:ea typeface="Ebrima" panose="02000000000000000000" pitchFamily="2" charset="0"/>
                     <a:cs typeface="Ebrima" panose="02000000000000000000" pitchFamily="2" charset="0"/>
@@ -15591,15 +15599,15 @@
                   <a:t> </a:t>
                 </a:r>
                 <a:r>
-                  <a:rPr lang="en-US" err="1">
+                  <a:rPr lang="en-US" dirty="0" err="1">
                     <a:latin typeface="+mj-lt"/>
                     <a:ea typeface="Ebrima" panose="02000000000000000000" pitchFamily="2" charset="0"/>
                     <a:cs typeface="Ebrima" panose="02000000000000000000" pitchFamily="2" charset="0"/>
                   </a:rPr>
-                  <a:t>và</a:t>
+                  <a:t>chọn</a:t>
                 </a:r>
                 <a:r>
-                  <a:rPr lang="en-US">
+                  <a:rPr lang="en-US" dirty="0">
                     <a:latin typeface="+mj-lt"/>
                     <a:ea typeface="Ebrima" panose="02000000000000000000" pitchFamily="2" charset="0"/>
                     <a:cs typeface="Ebrima" panose="02000000000000000000" pitchFamily="2" charset="0"/>
@@ -15607,15 +15615,15 @@
                   <a:t> </a:t>
                 </a:r>
                 <a:r>
-                  <a:rPr lang="en-US" err="1">
+                  <a:rPr lang="en-US" dirty="0" err="1">
                     <a:latin typeface="+mj-lt"/>
                     <a:ea typeface="Ebrima" panose="02000000000000000000" pitchFamily="2" charset="0"/>
                     <a:cs typeface="Ebrima" panose="02000000000000000000" pitchFamily="2" charset="0"/>
                   </a:rPr>
-                  <a:t>chọn</a:t>
+                  <a:t>lọc</a:t>
                 </a:r>
                 <a:r>
-                  <a:rPr lang="en-US">
+                  <a:rPr lang="en-US" dirty="0">
                     <a:latin typeface="+mj-lt"/>
                     <a:ea typeface="Ebrima" panose="02000000000000000000" pitchFamily="2" charset="0"/>
                     <a:cs typeface="Ebrima" panose="02000000000000000000" pitchFamily="2" charset="0"/>
@@ -15623,15 +15631,15 @@
                   <a:t> </a:t>
                 </a:r>
                 <a:r>
-                  <a:rPr lang="en-US" err="1">
+                  <a:rPr lang="en-US" dirty="0" err="1">
                     <a:latin typeface="+mj-lt"/>
                     <a:ea typeface="Ebrima" panose="02000000000000000000" pitchFamily="2" charset="0"/>
                     <a:cs typeface="Ebrima" panose="02000000000000000000" pitchFamily="2" charset="0"/>
                   </a:rPr>
-                  <a:t>lọc</a:t>
+                  <a:t>bằng</a:t>
                 </a:r>
                 <a:r>
-                  <a:rPr lang="en-US">
+                  <a:rPr lang="en-US" dirty="0">
                     <a:latin typeface="+mj-lt"/>
                     <a:ea typeface="Ebrima" panose="02000000000000000000" pitchFamily="2" charset="0"/>
                     <a:cs typeface="Ebrima" panose="02000000000000000000" pitchFamily="2" charset="0"/>
@@ -15639,15 +15647,15 @@
                   <a:t> </a:t>
                 </a:r>
                 <a:r>
-                  <a:rPr lang="en-US" err="1">
+                  <a:rPr lang="en-US" dirty="0" err="1">
                     <a:latin typeface="+mj-lt"/>
                     <a:ea typeface="Ebrima" panose="02000000000000000000" pitchFamily="2" charset="0"/>
                     <a:cs typeface="Ebrima" panose="02000000000000000000" pitchFamily="2" charset="0"/>
                   </a:rPr>
-                  <a:t>bằng</a:t>
+                  <a:t>chứng</a:t>
                 </a:r>
                 <a:r>
-                  <a:rPr lang="en-US">
+                  <a:rPr lang="en-US" dirty="0">
                     <a:latin typeface="+mj-lt"/>
                     <a:ea typeface="Ebrima" panose="02000000000000000000" pitchFamily="2" charset="0"/>
                     <a:cs typeface="Ebrima" panose="02000000000000000000" pitchFamily="2" charset="0"/>
@@ -15655,15 +15663,15 @@
                   <a:t> </a:t>
                 </a:r>
                 <a:r>
-                  <a:rPr lang="en-US" err="1">
+                  <a:rPr lang="en-US" dirty="0" err="1">
                     <a:latin typeface="+mj-lt"/>
                     <a:ea typeface="Ebrima" panose="02000000000000000000" pitchFamily="2" charset="0"/>
                     <a:cs typeface="Ebrima" panose="02000000000000000000" pitchFamily="2" charset="0"/>
                   </a:rPr>
-                  <a:t>chứng</a:t>
+                  <a:t>chính</a:t>
                 </a:r>
                 <a:r>
-                  <a:rPr lang="en-US">
+                  <a:rPr lang="en-US" dirty="0">
                     <a:latin typeface="+mj-lt"/>
                     <a:ea typeface="Ebrima" panose="02000000000000000000" pitchFamily="2" charset="0"/>
                     <a:cs typeface="Ebrima" panose="02000000000000000000" pitchFamily="2" charset="0"/>
@@ -15671,15 +15679,15 @@
                   <a:t> </a:t>
                 </a:r>
                 <a:r>
-                  <a:rPr lang="en-US" err="1">
+                  <a:rPr lang="en-US" dirty="0" err="1">
                     <a:latin typeface="+mj-lt"/>
                     <a:ea typeface="Ebrima" panose="02000000000000000000" pitchFamily="2" charset="0"/>
                     <a:cs typeface="Ebrima" panose="02000000000000000000" pitchFamily="2" charset="0"/>
                   </a:rPr>
-                  <a:t>chính</a:t>
+                  <a:t>xác</a:t>
                 </a:r>
                 <a:r>
-                  <a:rPr lang="en-US">
+                  <a:rPr lang="en-US" dirty="0">
                     <a:latin typeface="+mj-lt"/>
                     <a:ea typeface="Ebrima" panose="02000000000000000000" pitchFamily="2" charset="0"/>
                     <a:cs typeface="Ebrima" panose="02000000000000000000" pitchFamily="2" charset="0"/>
@@ -15687,7 +15695,23 @@
                   <a:t> </a:t>
                 </a:r>
                 <a:r>
-                  <a:rPr lang="en-US" err="1">
+                  <a:rPr lang="en-US" dirty="0" err="1">
+                    <a:latin typeface="+mj-lt"/>
+                    <a:ea typeface="Ebrima" panose="02000000000000000000" pitchFamily="2" charset="0"/>
+                    <a:cs typeface="Ebrima" panose="02000000000000000000" pitchFamily="2" charset="0"/>
+                  </a:rPr>
+                  <a:t>để</a:t>
+                </a:r>
+                <a:r>
+                  <a:rPr lang="en-US" dirty="0">
+                    <a:latin typeface="+mj-lt"/>
+                    <a:ea typeface="Ebrima" panose="02000000000000000000" pitchFamily="2" charset="0"/>
+                    <a:cs typeface="Ebrima" panose="02000000000000000000" pitchFamily="2" charset="0"/>
+                  </a:rPr>
+                  <a:t> </a:t>
+                </a:r>
+                <a:r>
+                  <a:rPr lang="en-US" dirty="0" err="1">
                     <a:latin typeface="+mj-lt"/>
                     <a:ea typeface="Ebrima" panose="02000000000000000000" pitchFamily="2" charset="0"/>
                     <a:cs typeface="Ebrima" panose="02000000000000000000" pitchFamily="2" charset="0"/>
@@ -15695,7 +15719,7 @@
                   <a:t>xác</a:t>
                 </a:r>
                 <a:r>
-                  <a:rPr lang="en-US">
+                  <a:rPr lang="en-US" dirty="0">
                     <a:latin typeface="+mj-lt"/>
                     <a:ea typeface="Ebrima" panose="02000000000000000000" pitchFamily="2" charset="0"/>
                     <a:cs typeface="Ebrima" panose="02000000000000000000" pitchFamily="2" charset="0"/>
@@ -15703,15 +15727,15 @@
                   <a:t> </a:t>
                 </a:r>
                 <a:r>
-                  <a:rPr lang="en-US" err="1">
+                  <a:rPr lang="en-US" dirty="0" err="1">
                     <a:latin typeface="+mj-lt"/>
                     <a:ea typeface="Ebrima" panose="02000000000000000000" pitchFamily="2" charset="0"/>
                     <a:cs typeface="Ebrima" panose="02000000000000000000" pitchFamily="2" charset="0"/>
                   </a:rPr>
-                  <a:t>để</a:t>
+                  <a:t>minh</a:t>
                 </a:r>
                 <a:r>
-                  <a:rPr lang="en-US">
+                  <a:rPr lang="en-US" dirty="0">
                     <a:latin typeface="+mj-lt"/>
                     <a:ea typeface="Ebrima" panose="02000000000000000000" pitchFamily="2" charset="0"/>
                     <a:cs typeface="Ebrima" panose="02000000000000000000" pitchFamily="2" charset="0"/>
@@ -15719,39 +15743,7 @@
                   <a:t> </a:t>
                 </a:r>
                 <a:r>
-                  <a:rPr lang="en-US" err="1">
-                    <a:latin typeface="+mj-lt"/>
-                    <a:ea typeface="Ebrima" panose="02000000000000000000" pitchFamily="2" charset="0"/>
-                    <a:cs typeface="Ebrima" panose="02000000000000000000" pitchFamily="2" charset="0"/>
-                  </a:rPr>
-                  <a:t>xác</a:t>
-                </a:r>
-                <a:r>
-                  <a:rPr lang="en-US">
-                    <a:latin typeface="+mj-lt"/>
-                    <a:ea typeface="Ebrima" panose="02000000000000000000" pitchFamily="2" charset="0"/>
-                    <a:cs typeface="Ebrima" panose="02000000000000000000" pitchFamily="2" charset="0"/>
-                  </a:rPr>
-                  <a:t> </a:t>
-                </a:r>
-                <a:r>
-                  <a:rPr lang="en-US" err="1">
-                    <a:latin typeface="+mj-lt"/>
-                    <a:ea typeface="Ebrima" panose="02000000000000000000" pitchFamily="2" charset="0"/>
-                    <a:cs typeface="Ebrima" panose="02000000000000000000" pitchFamily="2" charset="0"/>
-                  </a:rPr>
-                  <a:t>minh</a:t>
-                </a:r>
-                <a:r>
-                  <a:rPr lang="en-US">
-                    <a:latin typeface="+mj-lt"/>
-                    <a:ea typeface="Ebrima" panose="02000000000000000000" pitchFamily="2" charset="0"/>
-                    <a:cs typeface="Ebrima" panose="02000000000000000000" pitchFamily="2" charset="0"/>
-                  </a:rPr>
-                  <a:t> </a:t>
-                </a:r>
-                <a:r>
-                  <a:rPr lang="en-US" err="1">
+                  <a:rPr lang="en-US" dirty="0" err="1">
                     <a:latin typeface="+mj-lt"/>
                     <a:ea typeface="Ebrima" panose="02000000000000000000" pitchFamily="2" charset="0"/>
                     <a:cs typeface="Ebrima" panose="02000000000000000000" pitchFamily="2" charset="0"/>
@@ -15759,7 +15751,7 @@
                   <a:t>thông</a:t>
                 </a:r>
                 <a:r>
-                  <a:rPr lang="en-US">
+                  <a:rPr lang="en-US" dirty="0">
                     <a:latin typeface="+mj-lt"/>
                     <a:ea typeface="Ebrima" panose="02000000000000000000" pitchFamily="2" charset="0"/>
                     <a:cs typeface="Ebrima" panose="02000000000000000000" pitchFamily="2" charset="0"/>
@@ -15776,7 +15768,7 @@
                   <a:buChar char="•"/>
                 </a:pPr>
                 <a:r>
-                  <a:rPr lang="en-US" b="1" err="1">
+                  <a:rPr lang="en-US" b="1" dirty="0" err="1">
                     <a:latin typeface="+mj-lt"/>
                     <a:ea typeface="Ebrima" panose="02000000000000000000" pitchFamily="2" charset="0"/>
                     <a:cs typeface="Ebrima" panose="02000000000000000000" pitchFamily="2" charset="0"/>
@@ -15784,7 +15776,7 @@
                   <a:t>Đầu</a:t>
                 </a:r>
                 <a:r>
-                  <a:rPr lang="en-US" b="1">
+                  <a:rPr lang="en-US" b="1" dirty="0">
                     <a:latin typeface="+mj-lt"/>
                     <a:ea typeface="Ebrima" panose="02000000000000000000" pitchFamily="2" charset="0"/>
                     <a:cs typeface="Ebrima" panose="02000000000000000000" pitchFamily="2" charset="0"/>
@@ -15792,7 +15784,7 @@
                   <a:t> </a:t>
                 </a:r>
                 <a:r>
-                  <a:rPr lang="en-US" b="1" err="1">
+                  <a:rPr lang="en-US" b="1" dirty="0" err="1">
                     <a:latin typeface="+mj-lt"/>
                     <a:ea typeface="Ebrima" panose="02000000000000000000" pitchFamily="2" charset="0"/>
                     <a:cs typeface="Ebrima" panose="02000000000000000000" pitchFamily="2" charset="0"/>
@@ -15800,7 +15792,7 @@
                   <a:t>vào</a:t>
                 </a:r>
                 <a:r>
-                  <a:rPr lang="en-US" b="1">
+                  <a:rPr lang="en-US" b="1" dirty="0">
                     <a:latin typeface="+mj-lt"/>
                     <a:ea typeface="Ebrima" panose="02000000000000000000" pitchFamily="2" charset="0"/>
                     <a:cs typeface="Ebrima" panose="02000000000000000000" pitchFamily="2" charset="0"/>
@@ -15808,7 +15800,7 @@
                   <a:t>: </a:t>
                 </a:r>
                 <a:r>
-                  <a:rPr lang="en-US" err="1">
+                  <a:rPr lang="en-US" dirty="0" err="1">
                     <a:latin typeface="+mj-lt"/>
                     <a:ea typeface="Ebrima" panose="02000000000000000000" pitchFamily="2" charset="0"/>
                     <a:cs typeface="Ebrima" panose="02000000000000000000" pitchFamily="2" charset="0"/>
@@ -15816,7 +15808,7 @@
                   <a:t>đoạn</a:t>
                 </a:r>
                 <a:r>
-                  <a:rPr lang="en-US">
+                  <a:rPr lang="en-US" dirty="0">
                     <a:latin typeface="+mj-lt"/>
                     <a:ea typeface="Ebrima" panose="02000000000000000000" pitchFamily="2" charset="0"/>
                     <a:cs typeface="Ebrima" panose="02000000000000000000" pitchFamily="2" charset="0"/>
@@ -15824,7 +15816,7 @@
                   <a:t> </a:t>
                 </a:r>
                 <a:r>
-                  <a:rPr lang="en-US" err="1">
+                  <a:rPr lang="en-US" dirty="0" err="1">
                     <a:latin typeface="+mj-lt"/>
                     <a:ea typeface="Ebrima" panose="02000000000000000000" pitchFamily="2" charset="0"/>
                     <a:cs typeface="Ebrima" panose="02000000000000000000" pitchFamily="2" charset="0"/>
@@ -15832,7 +15824,7 @@
                   <a:t>văn</a:t>
                 </a:r>
                 <a:r>
-                  <a:rPr lang="en-US">
+                  <a:rPr lang="en-US" dirty="0">
                     <a:latin typeface="+mj-lt"/>
                     <a:ea typeface="Ebrima" panose="02000000000000000000" pitchFamily="2" charset="0"/>
                     <a:cs typeface="Ebrima" panose="02000000000000000000" pitchFamily="2" charset="0"/>
@@ -15840,7 +15832,7 @@
                   <a:t> </a:t>
                 </a:r>
                 <a:r>
-                  <a:rPr lang="en-US" err="1">
+                  <a:rPr lang="en-US" dirty="0" err="1">
                     <a:latin typeface="+mj-lt"/>
                     <a:ea typeface="Ebrima" panose="02000000000000000000" pitchFamily="2" charset="0"/>
                     <a:cs typeface="Ebrima" panose="02000000000000000000" pitchFamily="2" charset="0"/>
@@ -15848,7 +15840,7 @@
                   <a:t>bản</a:t>
                 </a:r>
                 <a:r>
-                  <a:rPr lang="en-US">
+                  <a:rPr lang="en-US" dirty="0">
                     <a:latin typeface="+mj-lt"/>
                     <a:ea typeface="Ebrima" panose="02000000000000000000" pitchFamily="2" charset="0"/>
                     <a:cs typeface="Ebrima" panose="02000000000000000000" pitchFamily="2" charset="0"/>
@@ -15993,7 +15985,7 @@
                   </m:oMath>
                 </a14:m>
                 <a:r>
-                  <a:rPr lang="en-US">
+                  <a:rPr lang="en-US" dirty="0">
                     <a:latin typeface="+mj-lt"/>
                     <a:ea typeface="Ebrima" panose="02000000000000000000" pitchFamily="2" charset="0"/>
                     <a:cs typeface="Ebrima" panose="02000000000000000000" pitchFamily="2" charset="0"/>
@@ -16001,7 +15993,7 @@
                   <a:t>, </a:t>
                 </a:r>
                 <a:r>
-                  <a:rPr lang="en-US" err="1">
+                  <a:rPr lang="en-US" dirty="0" err="1">
                     <a:latin typeface="+mj-lt"/>
                     <a:ea typeface="Ebrima" panose="02000000000000000000" pitchFamily="2" charset="0"/>
                     <a:cs typeface="Ebrima" panose="02000000000000000000" pitchFamily="2" charset="0"/>
@@ -16009,7 +16001,7 @@
                   <a:t>một</a:t>
                 </a:r>
                 <a:r>
-                  <a:rPr lang="en-US">
+                  <a:rPr lang="en-US" dirty="0">
                     <a:latin typeface="+mj-lt"/>
                     <a:ea typeface="Ebrima" panose="02000000000000000000" pitchFamily="2" charset="0"/>
                     <a:cs typeface="Ebrima" panose="02000000000000000000" pitchFamily="2" charset="0"/>
@@ -16017,7 +16009,7 @@
                   <a:t> </a:t>
                 </a:r>
                 <a:r>
-                  <a:rPr lang="en-US" err="1">
+                  <a:rPr lang="en-US" dirty="0" err="1">
                     <a:latin typeface="+mj-lt"/>
                     <a:ea typeface="Ebrima" panose="02000000000000000000" pitchFamily="2" charset="0"/>
                     <a:cs typeface="Ebrima" panose="02000000000000000000" pitchFamily="2" charset="0"/>
@@ -16025,7 +16017,7 @@
                   <a:t>câu</a:t>
                 </a:r>
                 <a:r>
-                  <a:rPr lang="en-US">
+                  <a:rPr lang="en-US" dirty="0">
                     <a:latin typeface="+mj-lt"/>
                     <a:ea typeface="Ebrima" panose="02000000000000000000" pitchFamily="2" charset="0"/>
                     <a:cs typeface="Ebrima" panose="02000000000000000000" pitchFamily="2" charset="0"/>
@@ -16045,7 +16037,7 @@
                   </m:oMath>
                 </a14:m>
                 <a:r>
-                  <a:rPr lang="en-US">
+                  <a:rPr lang="en-US" dirty="0">
                     <a:latin typeface="+mj-lt"/>
                     <a:ea typeface="Ebrima" panose="02000000000000000000" pitchFamily="2" charset="0"/>
                     <a:cs typeface="Ebrima" panose="02000000000000000000" pitchFamily="2" charset="0"/>
@@ -16062,7 +16054,7 @@
                   <a:buChar char="•"/>
                 </a:pPr>
                 <a:r>
-                  <a:rPr lang="en-US" b="1" err="1">
+                  <a:rPr lang="en-US" b="1" dirty="0" err="1">
                     <a:latin typeface="+mj-lt"/>
                     <a:ea typeface="Ebrima" panose="02000000000000000000" pitchFamily="2" charset="0"/>
                     <a:cs typeface="Ebrima" panose="02000000000000000000" pitchFamily="2" charset="0"/>
@@ -16070,7 +16062,7 @@
                   <a:t>Đầu</a:t>
                 </a:r>
                 <a:r>
-                  <a:rPr lang="en-US" b="1">
+                  <a:rPr lang="en-US" b="1" dirty="0">
                     <a:latin typeface="+mj-lt"/>
                     <a:ea typeface="Ebrima" panose="02000000000000000000" pitchFamily="2" charset="0"/>
                     <a:cs typeface="Ebrima" panose="02000000000000000000" pitchFamily="2" charset="0"/>
@@ -16078,7 +16070,7 @@
                   <a:t> </a:t>
                 </a:r>
                 <a:r>
-                  <a:rPr lang="en-US" b="1" err="1">
+                  <a:rPr lang="en-US" b="1" dirty="0" err="1">
                     <a:latin typeface="+mj-lt"/>
                     <a:ea typeface="Ebrima" panose="02000000000000000000" pitchFamily="2" charset="0"/>
                     <a:cs typeface="Ebrima" panose="02000000000000000000" pitchFamily="2" charset="0"/>
@@ -16086,7 +16078,7 @@
                   <a:t>ra</a:t>
                 </a:r>
                 <a:r>
-                  <a:rPr lang="en-US" b="1">
+                  <a:rPr lang="en-US" b="1" dirty="0">
                     <a:latin typeface="+mj-lt"/>
                     <a:ea typeface="Ebrima" panose="02000000000000000000" pitchFamily="2" charset="0"/>
                     <a:cs typeface="Ebrima" panose="02000000000000000000" pitchFamily="2" charset="0"/>
@@ -16094,7 +16086,7 @@
                   <a:t>: </a:t>
                 </a:r>
                 <a:r>
-                  <a:rPr lang="en-US" err="1">
+                  <a:rPr lang="en-US" dirty="0" err="1">
                     <a:latin typeface="+mj-lt"/>
                     <a:ea typeface="Ebrima" panose="02000000000000000000" pitchFamily="2" charset="0"/>
                     <a:cs typeface="Ebrima" panose="02000000000000000000" pitchFamily="2" charset="0"/>
@@ -16102,7 +16094,7 @@
                   <a:t>tập</a:t>
                 </a:r>
                 <a:r>
-                  <a:rPr lang="en-US">
+                  <a:rPr lang="en-US" dirty="0">
                     <a:latin typeface="+mj-lt"/>
                     <a:ea typeface="Ebrima" panose="02000000000000000000" pitchFamily="2" charset="0"/>
                     <a:cs typeface="Ebrima" panose="02000000000000000000" pitchFamily="2" charset="0"/>
@@ -16110,7 +16102,7 @@
                   <a:t> </a:t>
                 </a:r>
                 <a:r>
-                  <a:rPr lang="en-US" err="1">
+                  <a:rPr lang="en-US" dirty="0" err="1">
                     <a:latin typeface="+mj-lt"/>
                     <a:ea typeface="Ebrima" panose="02000000000000000000" pitchFamily="2" charset="0"/>
                     <a:cs typeface="Ebrima" panose="02000000000000000000" pitchFamily="2" charset="0"/>
@@ -16118,7 +16110,7 @@
                   <a:t>các</a:t>
                 </a:r>
                 <a:r>
-                  <a:rPr lang="en-US">
+                  <a:rPr lang="en-US" dirty="0">
                     <a:latin typeface="+mj-lt"/>
                     <a:ea typeface="Ebrima" panose="02000000000000000000" pitchFamily="2" charset="0"/>
                     <a:cs typeface="Ebrima" panose="02000000000000000000" pitchFamily="2" charset="0"/>
@@ -16126,7 +16118,7 @@
                   <a:t> </a:t>
                 </a:r>
                 <a:r>
-                  <a:rPr lang="en-US" err="1">
+                  <a:rPr lang="en-US" dirty="0" err="1">
                     <a:latin typeface="+mj-lt"/>
                     <a:ea typeface="Ebrima" panose="02000000000000000000" pitchFamily="2" charset="0"/>
                     <a:cs typeface="Ebrima" panose="02000000000000000000" pitchFamily="2" charset="0"/>
@@ -16134,7 +16126,7 @@
                   <a:t>câu</a:t>
                 </a:r>
                 <a:r>
-                  <a:rPr lang="en-US">
+                  <a:rPr lang="en-US" dirty="0">
                     <a:latin typeface="+mj-lt"/>
                     <a:ea typeface="Ebrima" panose="02000000000000000000" pitchFamily="2" charset="0"/>
                     <a:cs typeface="Ebrima" panose="02000000000000000000" pitchFamily="2" charset="0"/>
@@ -16142,7 +16134,7 @@
                   <a:t> </a:t>
                 </a:r>
                 <a:r>
-                  <a:rPr lang="en-US" err="1">
+                  <a:rPr lang="en-US" dirty="0" err="1">
                     <a:latin typeface="+mj-lt"/>
                     <a:ea typeface="Ebrima" panose="02000000000000000000" pitchFamily="2" charset="0"/>
                     <a:cs typeface="Ebrima" panose="02000000000000000000" pitchFamily="2" charset="0"/>
@@ -16150,7 +16142,7 @@
                   <a:t>là</a:t>
                 </a:r>
                 <a:r>
-                  <a:rPr lang="en-US">
+                  <a:rPr lang="en-US" dirty="0">
                     <a:latin typeface="+mj-lt"/>
                     <a:ea typeface="Ebrima" panose="02000000000000000000" pitchFamily="2" charset="0"/>
                     <a:cs typeface="Ebrima" panose="02000000000000000000" pitchFamily="2" charset="0"/>
@@ -16158,7 +16150,7 @@
                   <a:t> </a:t>
                 </a:r>
                 <a:r>
-                  <a:rPr lang="en-US" err="1">
+                  <a:rPr lang="en-US" dirty="0" err="1">
                     <a:latin typeface="+mj-lt"/>
                     <a:ea typeface="Ebrima" panose="02000000000000000000" pitchFamily="2" charset="0"/>
                     <a:cs typeface="Ebrima" panose="02000000000000000000" pitchFamily="2" charset="0"/>
@@ -16166,7 +16158,7 @@
                   <a:t>bằng</a:t>
                 </a:r>
                 <a:r>
-                  <a:rPr lang="en-US">
+                  <a:rPr lang="en-US" dirty="0">
                     <a:latin typeface="+mj-lt"/>
                     <a:ea typeface="Ebrima" panose="02000000000000000000" pitchFamily="2" charset="0"/>
                     <a:cs typeface="Ebrima" panose="02000000000000000000" pitchFamily="2" charset="0"/>
@@ -16174,7 +16166,7 @@
                   <a:t> </a:t>
                 </a:r>
                 <a:r>
-                  <a:rPr lang="en-US" err="1">
+                  <a:rPr lang="en-US" dirty="0" err="1">
                     <a:latin typeface="+mj-lt"/>
                     <a:ea typeface="Ebrima" panose="02000000000000000000" pitchFamily="2" charset="0"/>
                     <a:cs typeface="Ebrima" panose="02000000000000000000" pitchFamily="2" charset="0"/>
@@ -16182,7 +16174,7 @@
                   <a:t>chứng</a:t>
                 </a:r>
                 <a:r>
-                  <a:rPr lang="en-US">
+                  <a:rPr lang="en-US" dirty="0">
                     <a:latin typeface="+mj-lt"/>
                     <a:ea typeface="Ebrima" panose="02000000000000000000" pitchFamily="2" charset="0"/>
                     <a:cs typeface="Ebrima" panose="02000000000000000000" pitchFamily="2" charset="0"/>
@@ -16224,7 +16216,7 @@
                             <a:ea typeface="Ebrima" panose="02000000000000000000" pitchFamily="2" charset="0"/>
                             <a:cs typeface="Ebrima" panose="02000000000000000000" pitchFamily="2" charset="0"/>
                           </a:rPr>
-                          <m:t>𝑠</m:t>
+                          <m:t>𝑒</m:t>
                         </m:r>
                       </m:e>
                       <m:sub>
@@ -16263,7 +16255,7 @@
                             <a:ea typeface="Ebrima" panose="02000000000000000000" pitchFamily="2" charset="0"/>
                             <a:cs typeface="Ebrima" panose="02000000000000000000" pitchFamily="2" charset="0"/>
                           </a:rPr>
-                          <m:t>𝑠</m:t>
+                          <m:t>𝑒</m:t>
                         </m:r>
                       </m:e>
                       <m:sub>
@@ -16288,7 +16280,7 @@
                   </m:oMath>
                 </a14:m>
                 <a:r>
-                  <a:rPr lang="en-US">
+                  <a:rPr lang="en-US" dirty="0">
                     <a:latin typeface="+mj-lt"/>
                     <a:ea typeface="Ebrima" panose="02000000000000000000" pitchFamily="2" charset="0"/>
                     <a:cs typeface="Ebrima" panose="02000000000000000000" pitchFamily="2" charset="0"/>
@@ -16296,7 +16288,7 @@
                   <a:t> </a:t>
                 </a:r>
                 <a:r>
-                  <a:rPr lang="en-US" err="1">
+                  <a:rPr lang="en-US" dirty="0" err="1">
                     <a:latin typeface="+mj-lt"/>
                     <a:ea typeface="Ebrima" panose="02000000000000000000" pitchFamily="2" charset="0"/>
                     <a:cs typeface="Ebrima" panose="02000000000000000000" pitchFamily="2" charset="0"/>
@@ -16304,7 +16296,7 @@
                   <a:t>cho</a:t>
                 </a:r>
                 <a:r>
-                  <a:rPr lang="en-US">
+                  <a:rPr lang="en-US" dirty="0">
                     <a:latin typeface="+mj-lt"/>
                     <a:ea typeface="Ebrima" panose="02000000000000000000" pitchFamily="2" charset="0"/>
                     <a:cs typeface="Ebrima" panose="02000000000000000000" pitchFamily="2" charset="0"/>
@@ -16324,7 +16316,7 @@
                   </m:oMath>
                 </a14:m>
                 <a:r>
-                  <a:rPr lang="en-US">
+                  <a:rPr lang="en-US" dirty="0">
                     <a:latin typeface="+mj-lt"/>
                     <a:ea typeface="Ebrima" panose="02000000000000000000" pitchFamily="2" charset="0"/>
                     <a:cs typeface="Ebrima" panose="02000000000000000000" pitchFamily="2" charset="0"/>
@@ -16335,7 +16327,7 @@
             </p:txBody>
           </p:sp>
         </mc:Choice>
-        <mc:Fallback xmlns="">
+        <mc:Fallback>
           <p:sp>
             <p:nvSpPr>
               <p:cNvPr id="3" name="TextBox 2">
@@ -16894,8 +16886,8 @@
           </a:p>
         </p:txBody>
       </p:sp>
-      <mc:AlternateContent xmlns:mc="http://schemas.openxmlformats.org/markup-compatibility/2006" xmlns:a14="http://schemas.microsoft.com/office/drawing/2010/main">
-        <mc:Choice Requires="a14">
+      <mc:AlternateContent xmlns:mc="http://schemas.openxmlformats.org/markup-compatibility/2006">
+        <mc:Choice xmlns:a14="http://schemas.microsoft.com/office/drawing/2010/main" Requires="a14">
           <p:sp>
             <p:nvSpPr>
               <p:cNvPr id="3" name="TextBox 2">
@@ -16932,7 +16924,7 @@
                   <a:buChar char="•"/>
                 </a:pPr>
                 <a:r>
-                  <a:rPr lang="en-US" b="1">
+                  <a:rPr lang="en-US" b="1" dirty="0">
                     <a:latin typeface="+mj-lt"/>
                     <a:ea typeface="Ebrima" panose="02000000000000000000" pitchFamily="2" charset="0"/>
                     <a:cs typeface="Ebrima" panose="02000000000000000000" pitchFamily="2" charset="0"/>
@@ -16940,7 +16932,7 @@
                   <a:t>Mục </a:t>
                 </a:r>
                 <a:r>
-                  <a:rPr lang="en-US" b="1" err="1">
+                  <a:rPr lang="en-US" b="1" dirty="0" err="1">
                     <a:latin typeface="+mj-lt"/>
                     <a:ea typeface="Ebrima" panose="02000000000000000000" pitchFamily="2" charset="0"/>
                     <a:cs typeface="Ebrima" panose="02000000000000000000" pitchFamily="2" charset="0"/>
@@ -16948,7 +16940,7 @@
                   <a:t>đích</a:t>
                 </a:r>
                 <a:r>
-                  <a:rPr lang="en-US" b="1">
+                  <a:rPr lang="en-US" b="1" dirty="0">
                     <a:latin typeface="+mj-lt"/>
                     <a:ea typeface="Ebrima" panose="02000000000000000000" pitchFamily="2" charset="0"/>
                     <a:cs typeface="Ebrima" panose="02000000000000000000" pitchFamily="2" charset="0"/>
@@ -16956,7 +16948,7 @@
                   <a:t>: </a:t>
                 </a:r>
                 <a:r>
-                  <a:rPr lang="en-US">
+                  <a:rPr lang="en-US" dirty="0">
                     <a:latin typeface="+mj-lt"/>
                     <a:ea typeface="Ebrima" panose="02000000000000000000" pitchFamily="2" charset="0"/>
                     <a:cs typeface="Ebrima" panose="02000000000000000000" pitchFamily="2" charset="0"/>
@@ -16964,7 +16956,7 @@
                   <a:t>Do </a:t>
                 </a:r>
                 <a:r>
-                  <a:rPr lang="en-US" err="1">
+                  <a:rPr lang="en-US" dirty="0" err="1">
                     <a:latin typeface="+mj-lt"/>
                     <a:ea typeface="Ebrima" panose="02000000000000000000" pitchFamily="2" charset="0"/>
                     <a:cs typeface="Ebrima" panose="02000000000000000000" pitchFamily="2" charset="0"/>
@@ -16972,7 +16964,7 @@
                   <a:t>số</a:t>
                 </a:r>
                 <a:r>
-                  <a:rPr lang="en-US">
+                  <a:rPr lang="en-US" dirty="0">
                     <a:latin typeface="+mj-lt"/>
                     <a:ea typeface="Ebrima" panose="02000000000000000000" pitchFamily="2" charset="0"/>
                     <a:cs typeface="Ebrima" panose="02000000000000000000" pitchFamily="2" charset="0"/>
@@ -16980,7 +16972,7 @@
                   <a:t> </a:t>
                 </a:r>
                 <a:r>
-                  <a:rPr lang="en-US" err="1">
+                  <a:rPr lang="en-US" dirty="0" err="1">
                     <a:latin typeface="+mj-lt"/>
                     <a:ea typeface="Ebrima" panose="02000000000000000000" pitchFamily="2" charset="0"/>
                     <a:cs typeface="Ebrima" panose="02000000000000000000" pitchFamily="2" charset="0"/>
@@ -16988,7 +16980,7 @@
                   <a:t>lượng</a:t>
                 </a:r>
                 <a:r>
-                  <a:rPr lang="en-US">
+                  <a:rPr lang="en-US" dirty="0">
                     <a:latin typeface="+mj-lt"/>
                     <a:ea typeface="Ebrima" panose="02000000000000000000" pitchFamily="2" charset="0"/>
                     <a:cs typeface="Ebrima" panose="02000000000000000000" pitchFamily="2" charset="0"/>
@@ -16996,7 +16988,7 @@
                   <a:t> </a:t>
                 </a:r>
                 <a:r>
-                  <a:rPr lang="en-US" err="1">
+                  <a:rPr lang="en-US" dirty="0" err="1">
                     <a:latin typeface="+mj-lt"/>
                     <a:ea typeface="Ebrima" panose="02000000000000000000" pitchFamily="2" charset="0"/>
                     <a:cs typeface="Ebrima" panose="02000000000000000000" pitchFamily="2" charset="0"/>
@@ -17004,7 +16996,7 @@
                   <a:t>câu</a:t>
                 </a:r>
                 <a:r>
-                  <a:rPr lang="en-US">
+                  <a:rPr lang="en-US" dirty="0">
                     <a:latin typeface="+mj-lt"/>
                     <a:ea typeface="Ebrima" panose="02000000000000000000" pitchFamily="2" charset="0"/>
                     <a:cs typeface="Ebrima" panose="02000000000000000000" pitchFamily="2" charset="0"/>
@@ -17012,7 +17004,7 @@
                   <a:t> </a:t>
                 </a:r>
                 <a:r>
-                  <a:rPr lang="en-US" err="1">
+                  <a:rPr lang="en-US" dirty="0" err="1">
                     <a:latin typeface="+mj-lt"/>
                     <a:ea typeface="Ebrima" panose="02000000000000000000" pitchFamily="2" charset="0"/>
                     <a:cs typeface="Ebrima" panose="02000000000000000000" pitchFamily="2" charset="0"/>
@@ -17020,7 +17012,7 @@
                   <a:t>bằng</a:t>
                 </a:r>
                 <a:r>
-                  <a:rPr lang="en-US">
+                  <a:rPr lang="en-US" dirty="0">
                     <a:latin typeface="+mj-lt"/>
                     <a:ea typeface="Ebrima" panose="02000000000000000000" pitchFamily="2" charset="0"/>
                     <a:cs typeface="Ebrima" panose="02000000000000000000" pitchFamily="2" charset="0"/>
@@ -17028,7 +17020,7 @@
                   <a:t> </a:t>
                 </a:r>
                 <a:r>
-                  <a:rPr lang="en-US" err="1">
+                  <a:rPr lang="en-US" dirty="0" err="1">
                     <a:latin typeface="+mj-lt"/>
                     <a:ea typeface="Ebrima" panose="02000000000000000000" pitchFamily="2" charset="0"/>
                     <a:cs typeface="Ebrima" panose="02000000000000000000" pitchFamily="2" charset="0"/>
@@ -17036,7 +17028,7 @@
                   <a:t>chứng</a:t>
                 </a:r>
                 <a:r>
-                  <a:rPr lang="en-US">
+                  <a:rPr lang="en-US" dirty="0">
                     <a:latin typeface="+mj-lt"/>
                     <a:ea typeface="Ebrima" panose="02000000000000000000" pitchFamily="2" charset="0"/>
                     <a:cs typeface="Ebrima" panose="02000000000000000000" pitchFamily="2" charset="0"/>
@@ -17044,7 +17036,7 @@
                   <a:t> </a:t>
                 </a:r>
                 <a:r>
-                  <a:rPr lang="en-US" err="1">
+                  <a:rPr lang="en-US" dirty="0" err="1">
                     <a:latin typeface="+mj-lt"/>
                     <a:ea typeface="Ebrima" panose="02000000000000000000" pitchFamily="2" charset="0"/>
                     <a:cs typeface="Ebrima" panose="02000000000000000000" pitchFamily="2" charset="0"/>
@@ -17052,7 +17044,7 @@
                   <a:t>thay</a:t>
                 </a:r>
                 <a:r>
-                  <a:rPr lang="en-US">
+                  <a:rPr lang="en-US" dirty="0">
                     <a:latin typeface="+mj-lt"/>
                     <a:ea typeface="Ebrima" panose="02000000000000000000" pitchFamily="2" charset="0"/>
                     <a:cs typeface="Ebrima" panose="02000000000000000000" pitchFamily="2" charset="0"/>
@@ -17060,7 +17052,7 @@
                   <a:t> </a:t>
                 </a:r>
                 <a:r>
-                  <a:rPr lang="en-US" err="1">
+                  <a:rPr lang="en-US" dirty="0" err="1">
                     <a:latin typeface="+mj-lt"/>
                     <a:ea typeface="Ebrima" panose="02000000000000000000" pitchFamily="2" charset="0"/>
                     <a:cs typeface="Ebrima" panose="02000000000000000000" pitchFamily="2" charset="0"/>
@@ -17068,7 +17060,7 @@
                   <a:t>đổi</a:t>
                 </a:r>
                 <a:r>
-                  <a:rPr lang="en-US">
+                  <a:rPr lang="en-US" dirty="0">
                     <a:latin typeface="+mj-lt"/>
                     <a:ea typeface="Ebrima" panose="02000000000000000000" pitchFamily="2" charset="0"/>
                     <a:cs typeface="Ebrima" panose="02000000000000000000" pitchFamily="2" charset="0"/>
@@ -17076,7 +17068,7 @@
                   <a:t> </a:t>
                 </a:r>
                 <a:r>
-                  <a:rPr lang="en-US" err="1">
+                  <a:rPr lang="en-US" dirty="0" err="1">
                     <a:latin typeface="+mj-lt"/>
                     <a:ea typeface="Ebrima" panose="02000000000000000000" pitchFamily="2" charset="0"/>
                     <a:cs typeface="Ebrima" panose="02000000000000000000" pitchFamily="2" charset="0"/>
@@ -17084,7 +17076,7 @@
                   <a:t>theo</a:t>
                 </a:r>
                 <a:r>
-                  <a:rPr lang="en-US">
+                  <a:rPr lang="en-US" dirty="0">
                     <a:latin typeface="+mj-lt"/>
                     <a:ea typeface="Ebrima" panose="02000000000000000000" pitchFamily="2" charset="0"/>
                     <a:cs typeface="Ebrima" panose="02000000000000000000" pitchFamily="2" charset="0"/>
@@ -17092,7 +17084,7 @@
                   <a:t> </a:t>
                 </a:r>
                 <a:r>
-                  <a:rPr lang="en-US" err="1">
+                  <a:rPr lang="en-US" dirty="0" err="1">
                     <a:latin typeface="+mj-lt"/>
                     <a:ea typeface="Ebrima" panose="02000000000000000000" pitchFamily="2" charset="0"/>
                     <a:cs typeface="Ebrima" panose="02000000000000000000" pitchFamily="2" charset="0"/>
@@ -17100,7 +17092,7 @@
                   <a:t>từng</a:t>
                 </a:r>
                 <a:r>
-                  <a:rPr lang="en-US">
+                  <a:rPr lang="en-US" dirty="0">
                     <a:latin typeface="+mj-lt"/>
                     <a:ea typeface="Ebrima" panose="02000000000000000000" pitchFamily="2" charset="0"/>
                     <a:cs typeface="Ebrima" panose="02000000000000000000" pitchFamily="2" charset="0"/>
@@ -17108,7 +17100,7 @@
                   <a:t> claim, do </a:t>
                 </a:r>
                 <a:r>
-                  <a:rPr lang="en-US" err="1">
+                  <a:rPr lang="en-US" dirty="0" err="1">
                     <a:latin typeface="+mj-lt"/>
                     <a:ea typeface="Ebrima" panose="02000000000000000000" pitchFamily="2" charset="0"/>
                     <a:cs typeface="Ebrima" panose="02000000000000000000" pitchFamily="2" charset="0"/>
@@ -17116,7 +17108,7 @@
                   <a:t>đó</a:t>
                 </a:r>
                 <a:r>
-                  <a:rPr lang="en-US">
+                  <a:rPr lang="en-US" dirty="0">
                     <a:latin typeface="+mj-lt"/>
                     <a:ea typeface="Ebrima" panose="02000000000000000000" pitchFamily="2" charset="0"/>
                     <a:cs typeface="Ebrima" panose="02000000000000000000" pitchFamily="2" charset="0"/>
@@ -17124,26 +17116,26 @@
                   <a:t> t</a:t>
                 </a:r>
                 <a:r>
-                  <a:rPr lang="vi-VN"/>
+                  <a:rPr lang="vi-VN" dirty="0"/>
                   <a:t>hay vì chọn số lượng câu cố định, </a:t>
                 </a:r>
                 <a:r>
-                  <a:rPr lang="en-US" err="1"/>
+                  <a:rPr lang="en-US" dirty="0" err="1"/>
                   <a:t>nhóm</a:t>
                 </a:r>
                 <a:r>
-                  <a:rPr lang="en-US"/>
+                  <a:rPr lang="en-US" dirty="0"/>
                   <a:t> </a:t>
                 </a:r>
                 <a:r>
-                  <a:rPr lang="vi-VN"/>
+                  <a:rPr lang="vi-VN" dirty="0"/>
                   <a:t>đề xuất </a:t>
                 </a:r>
                 <a:r>
-                  <a:rPr lang="vi-VN" b="1"/>
+                  <a:rPr lang="vi-VN" b="1" dirty="0"/>
                   <a:t>chiến lược chọn bằng chứng động</a:t>
                 </a:r>
-                <a:endParaRPr lang="en-US"/>
+                <a:endParaRPr lang="en-US" dirty="0"/>
               </a:p>
               <a:p>
                 <a:pPr marL="285750" indent="-285750">
@@ -17154,7 +17146,7 @@
                   <a:buChar char="•"/>
                 </a:pPr>
                 <a:r>
-                  <a:rPr lang="en-US" b="1" err="1">
+                  <a:rPr lang="en-US" b="1" dirty="0" err="1">
                     <a:latin typeface="+mj-lt"/>
                     <a:ea typeface="Ebrima" panose="02000000000000000000" pitchFamily="2" charset="0"/>
                     <a:cs typeface="Ebrima" panose="02000000000000000000" pitchFamily="2" charset="0"/>
@@ -17162,7 +17154,7 @@
                   <a:t>Đầu</a:t>
                 </a:r>
                 <a:r>
-                  <a:rPr lang="en-US" b="1">
+                  <a:rPr lang="en-US" b="1" dirty="0">
                     <a:latin typeface="+mj-lt"/>
                     <a:ea typeface="Ebrima" panose="02000000000000000000" pitchFamily="2" charset="0"/>
                     <a:cs typeface="Ebrima" panose="02000000000000000000" pitchFamily="2" charset="0"/>
@@ -17170,7 +17162,7 @@
                   <a:t> </a:t>
                 </a:r>
                 <a:r>
-                  <a:rPr lang="en-US" b="1" err="1">
+                  <a:rPr lang="en-US" b="1" dirty="0" err="1">
                     <a:latin typeface="+mj-lt"/>
                     <a:ea typeface="Ebrima" panose="02000000000000000000" pitchFamily="2" charset="0"/>
                     <a:cs typeface="Ebrima" panose="02000000000000000000" pitchFamily="2" charset="0"/>
@@ -17178,7 +17170,7 @@
                   <a:t>vào</a:t>
                 </a:r>
                 <a:r>
-                  <a:rPr lang="en-US" b="1">
+                  <a:rPr lang="en-US" b="1" dirty="0">
                     <a:latin typeface="+mj-lt"/>
                     <a:ea typeface="Ebrima" panose="02000000000000000000" pitchFamily="2" charset="0"/>
                     <a:cs typeface="Ebrima" panose="02000000000000000000" pitchFamily="2" charset="0"/>
@@ -17186,7 +17178,7 @@
                   <a:t>: </a:t>
                 </a:r>
                 <a:r>
-                  <a:rPr lang="en-US">
+                  <a:rPr lang="en-US" dirty="0">
                     <a:latin typeface="+mj-lt"/>
                     <a:ea typeface="Ebrima" panose="02000000000000000000" pitchFamily="2" charset="0"/>
                     <a:cs typeface="Ebrima" panose="02000000000000000000" pitchFamily="2" charset="0"/>
@@ -17194,7 +17186,7 @@
                   <a:t>Các </a:t>
                 </a:r>
                 <a:r>
-                  <a:rPr lang="en-US" err="1">
+                  <a:rPr lang="en-US" dirty="0" err="1">
                     <a:latin typeface="+mj-lt"/>
                     <a:ea typeface="Ebrima" panose="02000000000000000000" pitchFamily="2" charset="0"/>
                     <a:cs typeface="Ebrima" panose="02000000000000000000" pitchFamily="2" charset="0"/>
@@ -17202,7 +17194,7 @@
                   <a:t>văn</a:t>
                 </a:r>
                 <a:r>
-                  <a:rPr lang="en-US">
+                  <a:rPr lang="en-US" dirty="0">
                     <a:latin typeface="+mj-lt"/>
                     <a:ea typeface="Ebrima" panose="02000000000000000000" pitchFamily="2" charset="0"/>
                     <a:cs typeface="Ebrima" panose="02000000000000000000" pitchFamily="2" charset="0"/>
@@ -17210,7 +17202,7 @@
                   <a:t> </a:t>
                 </a:r>
                 <a:r>
-                  <a:rPr lang="en-US" err="1">
+                  <a:rPr lang="en-US" dirty="0" err="1">
                     <a:latin typeface="+mj-lt"/>
                     <a:ea typeface="Ebrima" panose="02000000000000000000" pitchFamily="2" charset="0"/>
                     <a:cs typeface="Ebrima" panose="02000000000000000000" pitchFamily="2" charset="0"/>
@@ -17218,7 +17210,7 @@
                   <a:t>bản</a:t>
                 </a:r>
                 <a:r>
-                  <a:rPr lang="en-US">
+                  <a:rPr lang="en-US" dirty="0">
                     <a:latin typeface="+mj-lt"/>
                     <a:ea typeface="Ebrima" panose="02000000000000000000" pitchFamily="2" charset="0"/>
                     <a:cs typeface="Ebrima" panose="02000000000000000000" pitchFamily="2" charset="0"/>
@@ -17226,7 +17218,7 @@
                   <a:t> </a:t>
                 </a:r>
                 <a:r>
-                  <a:rPr lang="en-US" err="1">
+                  <a:rPr lang="en-US" dirty="0" err="1">
                     <a:latin typeface="+mj-lt"/>
                     <a:ea typeface="Ebrima" panose="02000000000000000000" pitchFamily="2" charset="0"/>
                     <a:cs typeface="Ebrima" panose="02000000000000000000" pitchFamily="2" charset="0"/>
@@ -17234,7 +17226,7 @@
                   <a:t>liên</a:t>
                 </a:r>
                 <a:r>
-                  <a:rPr lang="en-US">
+                  <a:rPr lang="en-US" dirty="0">
                     <a:latin typeface="+mj-lt"/>
                     <a:ea typeface="Ebrima" panose="02000000000000000000" pitchFamily="2" charset="0"/>
                     <a:cs typeface="Ebrima" panose="02000000000000000000" pitchFamily="2" charset="0"/>
@@ -17242,7 +17234,7 @@
                   <a:t> </a:t>
                 </a:r>
                 <a:r>
-                  <a:rPr lang="en-US" err="1">
+                  <a:rPr lang="en-US" dirty="0" err="1">
                     <a:latin typeface="+mj-lt"/>
                     <a:ea typeface="Ebrima" panose="02000000000000000000" pitchFamily="2" charset="0"/>
                     <a:cs typeface="Ebrima" panose="02000000000000000000" pitchFamily="2" charset="0"/>
@@ -17250,7 +17242,7 @@
                   <a:t>quan</a:t>
                 </a:r>
                 <a:r>
-                  <a:rPr lang="en-US">
+                  <a:rPr lang="en-US" dirty="0">
                     <a:latin typeface="+mj-lt"/>
                     <a:ea typeface="Ebrima" panose="02000000000000000000" pitchFamily="2" charset="0"/>
                     <a:cs typeface="Ebrima" panose="02000000000000000000" pitchFamily="2" charset="0"/>
@@ -17270,7 +17262,7 @@
                   </m:oMath>
                 </a14:m>
                 <a:r>
-                  <a:rPr lang="en-US">
+                  <a:rPr lang="en-US" dirty="0">
                     <a:latin typeface="+mj-lt"/>
                     <a:ea typeface="Ebrima" panose="02000000000000000000" pitchFamily="2" charset="0"/>
                     <a:cs typeface="Ebrima" panose="02000000000000000000" pitchFamily="2" charset="0"/>
@@ -17278,7 +17270,7 @@
                   <a:t> </a:t>
                 </a:r>
                 <a:r>
-                  <a:rPr lang="en-US" err="1">
+                  <a:rPr lang="en-US" dirty="0" err="1">
                     <a:latin typeface="+mj-lt"/>
                     <a:ea typeface="Ebrima" panose="02000000000000000000" pitchFamily="2" charset="0"/>
                     <a:cs typeface="Ebrima" panose="02000000000000000000" pitchFamily="2" charset="0"/>
@@ -17286,7 +17278,7 @@
                   <a:t>được</a:t>
                 </a:r>
                 <a:r>
-                  <a:rPr lang="en-US">
+                  <a:rPr lang="en-US" dirty="0">
                     <a:latin typeface="+mj-lt"/>
                     <a:ea typeface="Ebrima" panose="02000000000000000000" pitchFamily="2" charset="0"/>
                     <a:cs typeface="Ebrima" panose="02000000000000000000" pitchFamily="2" charset="0"/>
@@ -17294,7 +17286,7 @@
                   <a:t> </a:t>
                 </a:r>
                 <a:r>
-                  <a:rPr lang="en-US" err="1">
+                  <a:rPr lang="en-US" dirty="0" err="1">
                     <a:latin typeface="+mj-lt"/>
                     <a:ea typeface="Ebrima" panose="02000000000000000000" pitchFamily="2" charset="0"/>
                     <a:cs typeface="Ebrima" panose="02000000000000000000" pitchFamily="2" charset="0"/>
@@ -17302,7 +17294,7 @@
                   <a:t>trích</a:t>
                 </a:r>
                 <a:r>
-                  <a:rPr lang="en-US">
+                  <a:rPr lang="en-US" dirty="0">
                     <a:latin typeface="+mj-lt"/>
                     <a:ea typeface="Ebrima" panose="02000000000000000000" pitchFamily="2" charset="0"/>
                     <a:cs typeface="Ebrima" panose="02000000000000000000" pitchFamily="2" charset="0"/>
@@ -17310,7 +17302,7 @@
                   <a:t> </a:t>
                 </a:r>
                 <a:r>
-                  <a:rPr lang="en-US" err="1">
+                  <a:rPr lang="en-US" dirty="0" err="1">
                     <a:latin typeface="+mj-lt"/>
                     <a:ea typeface="Ebrima" panose="02000000000000000000" pitchFamily="2" charset="0"/>
                     <a:cs typeface="Ebrima" panose="02000000000000000000" pitchFamily="2" charset="0"/>
@@ -17318,7 +17310,7 @@
                   <a:t>xuất</a:t>
                 </a:r>
                 <a:r>
-                  <a:rPr lang="en-US">
+                  <a:rPr lang="en-US" dirty="0">
                     <a:latin typeface="+mj-lt"/>
                     <a:ea typeface="Ebrima" panose="02000000000000000000" pitchFamily="2" charset="0"/>
                     <a:cs typeface="Ebrima" panose="02000000000000000000" pitchFamily="2" charset="0"/>
@@ -17335,7 +17327,7 @@
                   <a:buChar char="•"/>
                 </a:pPr>
                 <a:r>
-                  <a:rPr lang="en-US" b="1" err="1">
+                  <a:rPr lang="en-US" b="1" dirty="0" err="1">
                     <a:latin typeface="+mj-lt"/>
                     <a:ea typeface="Ebrima" panose="02000000000000000000" pitchFamily="2" charset="0"/>
                     <a:cs typeface="Ebrima" panose="02000000000000000000" pitchFamily="2" charset="0"/>
@@ -17343,7 +17335,7 @@
                   <a:t>Đầu</a:t>
                 </a:r>
                 <a:r>
-                  <a:rPr lang="en-US" b="1">
+                  <a:rPr lang="en-US" b="1" dirty="0">
                     <a:latin typeface="+mj-lt"/>
                     <a:ea typeface="Ebrima" panose="02000000000000000000" pitchFamily="2" charset="0"/>
                     <a:cs typeface="Ebrima" panose="02000000000000000000" pitchFamily="2" charset="0"/>
@@ -17351,7 +17343,7 @@
                   <a:t> </a:t>
                 </a:r>
                 <a:r>
-                  <a:rPr lang="en-US" b="1" err="1">
+                  <a:rPr lang="en-US" b="1" dirty="0" err="1">
                     <a:latin typeface="+mj-lt"/>
                     <a:ea typeface="Ebrima" panose="02000000000000000000" pitchFamily="2" charset="0"/>
                     <a:cs typeface="Ebrima" panose="02000000000000000000" pitchFamily="2" charset="0"/>
@@ -17359,7 +17351,7 @@
                   <a:t>ra</a:t>
                 </a:r>
                 <a:r>
-                  <a:rPr lang="en-US" b="1">
+                  <a:rPr lang="en-US" b="1" dirty="0">
                     <a:latin typeface="+mj-lt"/>
                     <a:ea typeface="Ebrima" panose="02000000000000000000" pitchFamily="2" charset="0"/>
                     <a:cs typeface="Ebrima" panose="02000000000000000000" pitchFamily="2" charset="0"/>
@@ -17367,7 +17359,7 @@
                   <a:t>: </a:t>
                 </a:r>
                 <a:r>
-                  <a:rPr lang="en-US" err="1">
+                  <a:rPr lang="en-US" dirty="0" err="1">
                     <a:latin typeface="+mj-lt"/>
                     <a:ea typeface="Ebrima" panose="02000000000000000000" pitchFamily="2" charset="0"/>
                     <a:cs typeface="Ebrima" panose="02000000000000000000" pitchFamily="2" charset="0"/>
@@ -17375,7 +17367,7 @@
                   <a:t>tập</a:t>
                 </a:r>
                 <a:r>
-                  <a:rPr lang="en-US">
+                  <a:rPr lang="en-US" dirty="0">
                     <a:latin typeface="+mj-lt"/>
                     <a:ea typeface="Ebrima" panose="02000000000000000000" pitchFamily="2" charset="0"/>
                     <a:cs typeface="Ebrima" panose="02000000000000000000" pitchFamily="2" charset="0"/>
@@ -17383,7 +17375,7 @@
                   <a:t> </a:t>
                 </a:r>
                 <a:r>
-                  <a:rPr lang="en-US" err="1">
+                  <a:rPr lang="en-US" dirty="0" err="1">
                     <a:latin typeface="+mj-lt"/>
                     <a:ea typeface="Ebrima" panose="02000000000000000000" pitchFamily="2" charset="0"/>
                     <a:cs typeface="Ebrima" panose="02000000000000000000" pitchFamily="2" charset="0"/>
@@ -17391,7 +17383,7 @@
                   <a:t>các</a:t>
                 </a:r>
                 <a:r>
-                  <a:rPr lang="en-US">
+                  <a:rPr lang="en-US" dirty="0">
                     <a:latin typeface="+mj-lt"/>
                     <a:ea typeface="Ebrima" panose="02000000000000000000" pitchFamily="2" charset="0"/>
                     <a:cs typeface="Ebrima" panose="02000000000000000000" pitchFamily="2" charset="0"/>
@@ -17399,7 +17391,7 @@
                   <a:t> </a:t>
                 </a:r>
                 <a:r>
-                  <a:rPr lang="en-US" err="1">
+                  <a:rPr lang="en-US" dirty="0" err="1">
                     <a:latin typeface="+mj-lt"/>
                     <a:ea typeface="Ebrima" panose="02000000000000000000" pitchFamily="2" charset="0"/>
                     <a:cs typeface="Ebrima" panose="02000000000000000000" pitchFamily="2" charset="0"/>
@@ -17407,7 +17399,7 @@
                   <a:t>câu</a:t>
                 </a:r>
                 <a:r>
-                  <a:rPr lang="en-US">
+                  <a:rPr lang="en-US" dirty="0">
                     <a:latin typeface="+mj-lt"/>
                     <a:ea typeface="Ebrima" panose="02000000000000000000" pitchFamily="2" charset="0"/>
                     <a:cs typeface="Ebrima" panose="02000000000000000000" pitchFamily="2" charset="0"/>
@@ -17415,7 +17407,7 @@
                   <a:t> </a:t>
                 </a:r>
                 <a:r>
-                  <a:rPr lang="en-US" err="1">
+                  <a:rPr lang="en-US" dirty="0" err="1">
                     <a:latin typeface="+mj-lt"/>
                     <a:ea typeface="Ebrima" panose="02000000000000000000" pitchFamily="2" charset="0"/>
                     <a:cs typeface="Ebrima" panose="02000000000000000000" pitchFamily="2" charset="0"/>
@@ -17423,7 +17415,7 @@
                   <a:t>là</a:t>
                 </a:r>
                 <a:r>
-                  <a:rPr lang="en-US">
+                  <a:rPr lang="en-US" dirty="0">
                     <a:latin typeface="+mj-lt"/>
                     <a:ea typeface="Ebrima" panose="02000000000000000000" pitchFamily="2" charset="0"/>
                     <a:cs typeface="Ebrima" panose="02000000000000000000" pitchFamily="2" charset="0"/>
@@ -17431,7 +17423,7 @@
                   <a:t> </a:t>
                 </a:r>
                 <a:r>
-                  <a:rPr lang="en-US" err="1">
+                  <a:rPr lang="en-US" dirty="0" err="1">
                     <a:latin typeface="+mj-lt"/>
                     <a:ea typeface="Ebrima" panose="02000000000000000000" pitchFamily="2" charset="0"/>
                     <a:cs typeface="Ebrima" panose="02000000000000000000" pitchFamily="2" charset="0"/>
@@ -17439,7 +17431,7 @@
                   <a:t>bằng</a:t>
                 </a:r>
                 <a:r>
-                  <a:rPr lang="en-US">
+                  <a:rPr lang="en-US" dirty="0">
                     <a:latin typeface="+mj-lt"/>
                     <a:ea typeface="Ebrima" panose="02000000000000000000" pitchFamily="2" charset="0"/>
                     <a:cs typeface="Ebrima" panose="02000000000000000000" pitchFamily="2" charset="0"/>
@@ -17447,7 +17439,7 @@
                   <a:t> </a:t>
                 </a:r>
                 <a:r>
-                  <a:rPr lang="en-US" err="1">
+                  <a:rPr lang="en-US" dirty="0" err="1">
                     <a:latin typeface="+mj-lt"/>
                     <a:ea typeface="Ebrima" panose="02000000000000000000" pitchFamily="2" charset="0"/>
                     <a:cs typeface="Ebrima" panose="02000000000000000000" pitchFamily="2" charset="0"/>
@@ -17455,7 +17447,7 @@
                   <a:t>chứng</a:t>
                 </a:r>
                 <a:r>
-                  <a:rPr lang="en-US">
+                  <a:rPr lang="en-US" dirty="0">
                     <a:latin typeface="+mj-lt"/>
                     <a:ea typeface="Ebrima" panose="02000000000000000000" pitchFamily="2" charset="0"/>
                     <a:cs typeface="Ebrima" panose="02000000000000000000" pitchFamily="2" charset="0"/>
@@ -17497,7 +17489,7 @@
                             <a:ea typeface="Ebrima" panose="02000000000000000000" pitchFamily="2" charset="0"/>
                             <a:cs typeface="Ebrima" panose="02000000000000000000" pitchFamily="2" charset="0"/>
                           </a:rPr>
-                          <m:t>𝑠</m:t>
+                          <m:t>𝑒</m:t>
                         </m:r>
                       </m:e>
                       <m:sub>
@@ -17536,7 +17528,7 @@
                             <a:ea typeface="Ebrima" panose="02000000000000000000" pitchFamily="2" charset="0"/>
                             <a:cs typeface="Ebrima" panose="02000000000000000000" pitchFamily="2" charset="0"/>
                           </a:rPr>
-                          <m:t>𝑠</m:t>
+                          <m:t>𝑒</m:t>
                         </m:r>
                       </m:e>
                       <m:sub>
@@ -17561,7 +17553,7 @@
                   </m:oMath>
                 </a14:m>
                 <a:r>
-                  <a:rPr lang="en-US">
+                  <a:rPr lang="en-US" dirty="0">
                     <a:latin typeface="+mj-lt"/>
                     <a:ea typeface="Ebrima" panose="02000000000000000000" pitchFamily="2" charset="0"/>
                     <a:cs typeface="Ebrima" panose="02000000000000000000" pitchFamily="2" charset="0"/>
@@ -17569,7 +17561,7 @@
                   <a:t> </a:t>
                 </a:r>
                 <a:r>
-                  <a:rPr lang="en-US" err="1">
+                  <a:rPr lang="en-US" dirty="0" err="1">
                     <a:latin typeface="+mj-lt"/>
                     <a:ea typeface="Ebrima" panose="02000000000000000000" pitchFamily="2" charset="0"/>
                     <a:cs typeface="Ebrima" panose="02000000000000000000" pitchFamily="2" charset="0"/>
@@ -17577,7 +17569,7 @@
                   <a:t>cho</a:t>
                 </a:r>
                 <a:r>
-                  <a:rPr lang="en-US">
+                  <a:rPr lang="en-US" dirty="0">
                     <a:latin typeface="+mj-lt"/>
                     <a:ea typeface="Ebrima" panose="02000000000000000000" pitchFamily="2" charset="0"/>
                     <a:cs typeface="Ebrima" panose="02000000000000000000" pitchFamily="2" charset="0"/>
@@ -17597,7 +17589,7 @@
                   </m:oMath>
                 </a14:m>
                 <a:r>
-                  <a:rPr lang="en-US">
+                  <a:rPr lang="en-US" dirty="0">
                     <a:latin typeface="+mj-lt"/>
                     <a:ea typeface="Ebrima" panose="02000000000000000000" pitchFamily="2" charset="0"/>
                     <a:cs typeface="Ebrima" panose="02000000000000000000" pitchFamily="2" charset="0"/>
@@ -17608,7 +17600,7 @@
             </p:txBody>
           </p:sp>
         </mc:Choice>
-        <mc:Fallback xmlns="">
+        <mc:Fallback>
           <p:sp>
             <p:nvSpPr>
               <p:cNvPr id="3" name="TextBox 2">
@@ -42495,115 +42487,115 @@
               <a:buChar char="•"/>
             </a:pPr>
             <a:r>
-              <a:rPr lang="en-US">
+              <a:rPr lang="en-US" dirty="0">
                 <a:ea typeface="Ebrima" panose="02000000000000000000" pitchFamily="2" charset="0"/>
               </a:rPr>
               <a:t>Duong et al. (2023): Khai </a:t>
             </a:r>
             <a:r>
-              <a:rPr lang="en-US" err="1">
+              <a:rPr lang="en-US" dirty="0" err="1">
                 <a:ea typeface="Ebrima" panose="02000000000000000000" pitchFamily="2" charset="0"/>
               </a:rPr>
               <a:t>thác</a:t>
             </a:r>
             <a:r>
-              <a:rPr lang="en-US">
+              <a:rPr lang="en-US" dirty="0">
                 <a:ea typeface="Ebrima" panose="02000000000000000000" pitchFamily="2" charset="0"/>
               </a:rPr>
               <a:t> </a:t>
             </a:r>
             <a:r>
-              <a:rPr lang="en-US" err="1">
+              <a:rPr lang="en-US" dirty="0" err="1">
                 <a:ea typeface="Ebrima" panose="02000000000000000000" pitchFamily="2" charset="0"/>
               </a:rPr>
               <a:t>đồ</a:t>
             </a:r>
             <a:r>
-              <a:rPr lang="en-US">
+              <a:rPr lang="en-US" dirty="0">
                 <a:ea typeface="Ebrima" panose="02000000000000000000" pitchFamily="2" charset="0"/>
               </a:rPr>
               <a:t> </a:t>
             </a:r>
             <a:r>
-              <a:rPr lang="en-US" err="1">
+              <a:rPr lang="en-US" dirty="0" err="1">
                 <a:ea typeface="Ebrima" panose="02000000000000000000" pitchFamily="2" charset="0"/>
               </a:rPr>
               <a:t>thị</a:t>
             </a:r>
             <a:r>
-              <a:rPr lang="en-US">
+              <a:rPr lang="en-US" dirty="0">
                 <a:ea typeface="Ebrima" panose="02000000000000000000" pitchFamily="2" charset="0"/>
               </a:rPr>
               <a:t> tri </a:t>
             </a:r>
             <a:r>
-              <a:rPr lang="en-US" err="1">
+              <a:rPr lang="en-US" dirty="0" err="1">
                 <a:ea typeface="Ebrima" panose="02000000000000000000" pitchFamily="2" charset="0"/>
               </a:rPr>
               <a:t>thức</a:t>
             </a:r>
             <a:r>
-              <a:rPr lang="en-US">
+              <a:rPr lang="en-US" dirty="0">
                 <a:ea typeface="Ebrima" panose="02000000000000000000" pitchFamily="2" charset="0"/>
               </a:rPr>
               <a:t> </a:t>
             </a:r>
             <a:r>
-              <a:rPr lang="en-US" err="1">
+              <a:rPr lang="en-US" dirty="0" err="1">
                 <a:ea typeface="Ebrima" panose="02000000000000000000" pitchFamily="2" charset="0"/>
               </a:rPr>
               <a:t>trong</a:t>
             </a:r>
             <a:r>
-              <a:rPr lang="en-US">
+              <a:rPr lang="en-US" dirty="0">
                 <a:ea typeface="Ebrima" panose="02000000000000000000" pitchFamily="2" charset="0"/>
               </a:rPr>
               <a:t> </a:t>
             </a:r>
             <a:r>
-              <a:rPr lang="en-US" err="1">
+              <a:rPr lang="en-US" dirty="0" err="1">
                 <a:ea typeface="Ebrima" panose="02000000000000000000" pitchFamily="2" charset="0"/>
               </a:rPr>
               <a:t>tác</a:t>
             </a:r>
             <a:r>
-              <a:rPr lang="en-US">
+              <a:rPr lang="en-US" dirty="0">
                 <a:ea typeface="Ebrima" panose="02000000000000000000" pitchFamily="2" charset="0"/>
               </a:rPr>
               <a:t> </a:t>
             </a:r>
             <a:r>
-              <a:rPr lang="en-US" err="1">
+              <a:rPr lang="en-US" dirty="0" err="1">
                 <a:ea typeface="Ebrima" panose="02000000000000000000" pitchFamily="2" charset="0"/>
               </a:rPr>
               <a:t>vụ</a:t>
             </a:r>
             <a:r>
-              <a:rPr lang="en-US">
+              <a:rPr lang="en-US" dirty="0">
                 <a:ea typeface="Ebrima" panose="02000000000000000000" pitchFamily="2" charset="0"/>
               </a:rPr>
               <a:t> </a:t>
             </a:r>
             <a:r>
-              <a:rPr lang="en-US" err="1">
+              <a:rPr lang="en-US" dirty="0" err="1">
                 <a:ea typeface="Ebrima" panose="02000000000000000000" pitchFamily="2" charset="0"/>
               </a:rPr>
               <a:t>xác</a:t>
             </a:r>
             <a:r>
-              <a:rPr lang="en-US">
+              <a:rPr lang="en-US" dirty="0">
                 <a:ea typeface="Ebrima" panose="02000000000000000000" pitchFamily="2" charset="0"/>
               </a:rPr>
               <a:t> </a:t>
             </a:r>
             <a:r>
-              <a:rPr lang="en-US" err="1">
+              <a:rPr lang="en-US" dirty="0" err="1">
                 <a:ea typeface="Ebrima" panose="02000000000000000000" pitchFamily="2" charset="0"/>
               </a:rPr>
               <a:t>thực</a:t>
             </a:r>
             <a:r>
-              <a:rPr lang="en-US">
+              <a:rPr lang="en-US" dirty="0">
                 <a:ea typeface="Ebrima" panose="02000000000000000000" pitchFamily="2" charset="0"/>
               </a:rPr>
               <a:t> claim</a:t>
@@ -42618,61 +42610,61 @@
               <a:buChar char="•"/>
             </a:pPr>
             <a:r>
-              <a:rPr lang="en-US" err="1">
+              <a:rPr lang="en-US" dirty="0" err="1">
                 <a:ea typeface="Ebrima" panose="02000000000000000000" pitchFamily="2" charset="0"/>
               </a:rPr>
               <a:t>ViWikiFC</a:t>
             </a:r>
             <a:r>
-              <a:rPr lang="en-US">
+              <a:rPr lang="en-US" dirty="0">
                 <a:ea typeface="Ebrima" panose="02000000000000000000" pitchFamily="2" charset="0"/>
               </a:rPr>
               <a:t> (2024): </a:t>
             </a:r>
             <a:r>
-              <a:rPr lang="en-US" err="1">
+              <a:rPr lang="en-US" dirty="0" err="1">
                 <a:ea typeface="Ebrima" panose="02000000000000000000" pitchFamily="2" charset="0"/>
               </a:rPr>
               <a:t>Dựa</a:t>
             </a:r>
             <a:r>
-              <a:rPr lang="en-US">
+              <a:rPr lang="en-US" dirty="0">
                 <a:ea typeface="Ebrima" panose="02000000000000000000" pitchFamily="2" charset="0"/>
               </a:rPr>
               <a:t> </a:t>
             </a:r>
             <a:r>
-              <a:rPr lang="en-US" err="1">
+              <a:rPr lang="en-US" dirty="0" err="1">
                 <a:ea typeface="Ebrima" panose="02000000000000000000" pitchFamily="2" charset="0"/>
               </a:rPr>
               <a:t>trên</a:t>
             </a:r>
             <a:r>
-              <a:rPr lang="en-US">
+              <a:rPr lang="en-US" dirty="0">
                 <a:ea typeface="Ebrima" panose="02000000000000000000" pitchFamily="2" charset="0"/>
               </a:rPr>
               <a:t> tri </a:t>
             </a:r>
             <a:r>
-              <a:rPr lang="en-US" err="1">
+              <a:rPr lang="en-US" dirty="0" err="1">
                 <a:ea typeface="Ebrima" panose="02000000000000000000" pitchFamily="2" charset="0"/>
               </a:rPr>
               <a:t>thức</a:t>
             </a:r>
             <a:r>
-              <a:rPr lang="en-US">
+              <a:rPr lang="en-US" dirty="0">
                 <a:ea typeface="Ebrima" panose="02000000000000000000" pitchFamily="2" charset="0"/>
               </a:rPr>
               <a:t> </a:t>
             </a:r>
             <a:r>
-              <a:rPr lang="en-US" err="1">
+              <a:rPr lang="en-US" dirty="0" err="1">
                 <a:ea typeface="Ebrima" panose="02000000000000000000" pitchFamily="2" charset="0"/>
               </a:rPr>
               <a:t>của</a:t>
             </a:r>
             <a:r>
-              <a:rPr lang="en-US">
+              <a:rPr lang="en-US" dirty="0">
                 <a:ea typeface="Ebrima" panose="02000000000000000000" pitchFamily="2" charset="0"/>
               </a:rPr>
               <a:t> Wikipedia</a:t>
@@ -42687,22 +42679,26 @@
               <a:buChar char="•"/>
             </a:pPr>
             <a:r>
-              <a:rPr lang="en-US" err="1">
+              <a:rPr lang="en-US" dirty="0" err="1">
                 <a:ea typeface="Ebrima" panose="02000000000000000000" pitchFamily="2" charset="0"/>
               </a:rPr>
               <a:t>ViFactCheck</a:t>
             </a:r>
             <a:r>
-              <a:rPr lang="en-US">
+              <a:rPr lang="en-US" dirty="0">
                 <a:ea typeface="Ebrima" panose="02000000000000000000" pitchFamily="2" charset="0"/>
               </a:rPr>
               <a:t> (2025): B</a:t>
             </a:r>
             <a:r>
-              <a:rPr lang="vi-VN"/>
-              <a:t>enchmark đầu tiên do con người gán nhãn, đa lĩnh vực</a:t>
-            </a:r>
-            <a:endParaRPr lang="en-US">
+              <a:rPr lang="vi-VN" dirty="0" err="1"/>
+              <a:t>enchmark</a:t>
+            </a:r>
+            <a:r>
+              <a:rPr lang="vi-VN" dirty="0"/>
+              <a:t> đầu tiên do con người gán nhãn, đa lĩnh vực</a:t>
+            </a:r>
+            <a:endParaRPr lang="en-US" dirty="0">
               <a:ea typeface="Ebrima" panose="02000000000000000000" pitchFamily="2" charset="0"/>
             </a:endParaRPr>
           </a:p>
@@ -49123,14 +49119,6 @@
 </file>
 
 <file path=customXml/item1.xml><?xml version="1.0" encoding="utf-8"?>
-<p:properties xmlns:p="http://schemas.microsoft.com/office/2006/metadata/properties" xmlns:xsi="http://www.w3.org/2001/XMLSchema-instance" xmlns:pc="http://schemas.microsoft.com/office/infopath/2007/PartnerControls">
-  <documentManagement>
-    <_activity xmlns="9845fe17-0817-4ef9-96bc-9199a3d73abc" xsi:nil="true"/>
-  </documentManagement>
-</p:properties>
-</file>
-
-<file path=customXml/item2.xml><?xml version="1.0" encoding="utf-8"?>
 <ct:contentTypeSchema xmlns:ct="http://schemas.microsoft.com/office/2006/metadata/contentType" xmlns:ma="http://schemas.microsoft.com/office/2006/metadata/properties/metaAttributes" ct:_="" ma:_="" ma:contentTypeName="Document" ma:contentTypeID="0x010100171C697862BC5E40A1558EFFD2E56BC8" ma:contentTypeVersion="15" ma:contentTypeDescription="Create a new document." ma:contentTypeScope="" ma:versionID="16b852bbebdc2e65fab18518ed66886d">
   <xsd:schema xmlns:xsd="http://www.w3.org/2001/XMLSchema" xmlns:xs="http://www.w3.org/2001/XMLSchema" xmlns:p="http://schemas.microsoft.com/office/2006/metadata/properties" xmlns:ns3="9845fe17-0817-4ef9-96bc-9199a3d73abc" xmlns:ns4="b9b855bf-7959-4fd5-b596-e8b826bf4994" targetNamespace="http://schemas.microsoft.com/office/2006/metadata/properties" ma:root="true" ma:fieldsID="e3477a50ed6e38551ebe928340b42c8f" ns3:_="" ns4:_="">
     <xsd:import namespace="9845fe17-0817-4ef9-96bc-9199a3d73abc"/>
@@ -49363,6 +49351,14 @@
 </ct:contentTypeSchema>
 </file>
 
+<file path=customXml/item2.xml><?xml version="1.0" encoding="utf-8"?>
+<p:properties xmlns:p="http://schemas.microsoft.com/office/2006/metadata/properties" xmlns:xsi="http://www.w3.org/2001/XMLSchema-instance" xmlns:pc="http://schemas.microsoft.com/office/infopath/2007/PartnerControls">
+  <documentManagement>
+    <_activity xmlns="9845fe17-0817-4ef9-96bc-9199a3d73abc" xsi:nil="true"/>
+  </documentManagement>
+</p:properties>
+</file>
+
 <file path=customXml/item3.xml><?xml version="1.0" encoding="utf-8"?>
 <?mso-contentType ?>
 <FormTemplates xmlns="http://schemas.microsoft.com/sharepoint/v3/contenttype/forms">
@@ -49373,23 +49369,6 @@
 </file>
 
 <file path=customXml/itemProps1.xml><?xml version="1.0" encoding="utf-8"?>
-<ds:datastoreItem xmlns:ds="http://schemas.openxmlformats.org/officeDocument/2006/customXml" ds:itemID="{0AFD2C91-5320-4DAB-BFA0-F867FCA8DAEE}">
-  <ds:schemaRefs>
-    <ds:schemaRef ds:uri="9845fe17-0817-4ef9-96bc-9199a3d73abc"/>
-    <ds:schemaRef ds:uri="b9b855bf-7959-4fd5-b596-e8b826bf4994"/>
-    <ds:schemaRef ds:uri="http://purl.org/dc/dcmitype/"/>
-    <ds:schemaRef ds:uri="http://purl.org/dc/elements/1.1/"/>
-    <ds:schemaRef ds:uri="http://purl.org/dc/terms/"/>
-    <ds:schemaRef ds:uri="http://schemas.microsoft.com/office/2006/documentManagement/types"/>
-    <ds:schemaRef ds:uri="http://schemas.microsoft.com/office/2006/metadata/properties"/>
-    <ds:schemaRef ds:uri="http://schemas.microsoft.com/office/infopath/2007/PartnerControls"/>
-    <ds:schemaRef ds:uri="http://schemas.openxmlformats.org/package/2006/metadata/core-properties"/>
-    <ds:schemaRef ds:uri="http://www.w3.org/XML/1998/namespace"/>
-  </ds:schemaRefs>
-</ds:datastoreItem>
-</file>
-
-<file path=customXml/itemProps2.xml><?xml version="1.0" encoding="utf-8"?>
 <ds:datastoreItem xmlns:ds="http://schemas.openxmlformats.org/officeDocument/2006/customXml" ds:itemID="{1F363459-8858-4964-B870-24394BA35B9A}">
   <ds:schemaRefs>
     <ds:schemaRef ds:uri="9845fe17-0817-4ef9-96bc-9199a3d73abc"/>
@@ -49408,6 +49387,23 @@
 </ds:datastoreItem>
 </file>
 
+<file path=customXml/itemProps2.xml><?xml version="1.0" encoding="utf-8"?>
+<ds:datastoreItem xmlns:ds="http://schemas.openxmlformats.org/officeDocument/2006/customXml" ds:itemID="{0AFD2C91-5320-4DAB-BFA0-F867FCA8DAEE}">
+  <ds:schemaRefs>
+    <ds:schemaRef ds:uri="9845fe17-0817-4ef9-96bc-9199a3d73abc"/>
+    <ds:schemaRef ds:uri="b9b855bf-7959-4fd5-b596-e8b826bf4994"/>
+    <ds:schemaRef ds:uri="http://purl.org/dc/dcmitype/"/>
+    <ds:schemaRef ds:uri="http://purl.org/dc/elements/1.1/"/>
+    <ds:schemaRef ds:uri="http://purl.org/dc/terms/"/>
+    <ds:schemaRef ds:uri="http://schemas.microsoft.com/office/2006/documentManagement/types"/>
+    <ds:schemaRef ds:uri="http://schemas.microsoft.com/office/2006/metadata/properties"/>
+    <ds:schemaRef ds:uri="http://schemas.microsoft.com/office/infopath/2007/PartnerControls"/>
+    <ds:schemaRef ds:uri="http://schemas.openxmlformats.org/package/2006/metadata/core-properties"/>
+    <ds:schemaRef ds:uri="http://www.w3.org/XML/1998/namespace"/>
+  </ds:schemaRefs>
+</ds:datastoreItem>
+</file>
+
 <file path=customXml/itemProps3.xml><?xml version="1.0" encoding="utf-8"?>
 <ds:datastoreItem xmlns:ds="http://schemas.openxmlformats.org/officeDocument/2006/customXml" ds:itemID="{B97282BB-972B-407B-B7DE-ADCBEF42554E}">
   <ds:schemaRefs>
